--- a/catalog/editorial/templates/ed_table_three_columns_4.pptx
+++ b/catalog/editorial/templates/ed_table_three_columns_4.pptx
@@ -3577,7 +3577,7 @@
           <a:noFill/>
         </p:spPr>
         <p:txBody>
-          <a:bodyPr wrap="square" lIns="18288" rIns="18288" tIns="13716" bIns="13716">
+          <a:bodyPr wrap="square" anchor="t" lIns="18288" rIns="18288" tIns="13716" bIns="13716">
             <a:noAutofit/>
           </a:bodyPr>
           <a:lstStyle/>
@@ -3632,7 +3632,7 @@
           <a:noFill/>
         </p:spPr>
         <p:txBody>
-          <a:bodyPr wrap="square" lIns="18288" rIns="18288" tIns="13716" bIns="13716">
+          <a:bodyPr wrap="square" anchor="t" lIns="18288" rIns="18288" tIns="13716" bIns="13716">
             <a:noAutofit/>
           </a:bodyPr>
           <a:lstStyle/>
@@ -3687,7 +3687,7 @@
           <a:noFill/>
         </p:spPr>
         <p:txBody>
-          <a:bodyPr wrap="square" lIns="18288" rIns="18288" tIns="13716" bIns="13716">
+          <a:bodyPr wrap="square" anchor="t" lIns="18288" rIns="18288" tIns="13716" bIns="13716">
             <a:noAutofit/>
           </a:bodyPr>
           <a:lstStyle/>
@@ -3786,7 +3786,7 @@
           <a:noFill/>
         </p:spPr>
         <p:txBody>
-          <a:bodyPr wrap="square" lIns="18288" rIns="18288" tIns="13716" bIns="13716">
+          <a:bodyPr wrap="square" anchor="t" lIns="18288" rIns="18288" tIns="13716" bIns="13716">
             <a:noAutofit/>
           </a:bodyPr>
           <a:lstStyle/>
@@ -3841,7 +3841,7 @@
           <a:noFill/>
         </p:spPr>
         <p:txBody>
-          <a:bodyPr wrap="square" lIns="18288" rIns="18288" tIns="13716" bIns="13716">
+          <a:bodyPr wrap="square" anchor="t" lIns="18288" rIns="18288" tIns="13716" bIns="13716">
             <a:noAutofit/>
           </a:bodyPr>
           <a:lstStyle/>
@@ -3905,7 +3905,7 @@
               <a:tr h="713232">
                 <a:tc>
                   <a:txBody>
-                    <a:bodyPr wrap="square" lIns="18288" rIns="18288" tIns="13716" bIns="13716">
+                    <a:bodyPr wrap="square" anchor="t" lIns="18288" rIns="18288" tIns="13716" bIns="13716">
                       <a:noAutofit/>
                     </a:bodyPr>
                     <a:lstStyle/>
@@ -3942,7 +3942,7 @@
                       </a:r>
                     </a:p>
                   </a:txBody>
-                  <a:tcPr marL="155448" marR="155448" marT="64008" marB="64008">
+                  <a:tcPr marL="155448" marR="155448" marT="64008" marB="64008" anchor="ctr">
                     <a:solidFill>
                       <a:srgbClr val="213547"/>
                     </a:solidFill>
@@ -3950,7 +3950,7 @@
                 </a:tc>
                 <a:tc>
                   <a:txBody>
-                    <a:bodyPr wrap="square" lIns="18288" rIns="18288" tIns="13716" bIns="13716">
+                    <a:bodyPr wrap="square" anchor="t" lIns="18288" rIns="18288" tIns="13716" bIns="13716">
                       <a:noAutofit/>
                     </a:bodyPr>
                     <a:lstStyle/>
@@ -3987,7 +3987,7 @@
                       </a:r>
                     </a:p>
                   </a:txBody>
-                  <a:tcPr marL="155448" marR="155448" marT="64008" marB="64008">
+                  <a:tcPr marL="155448" marR="155448" marT="64008" marB="64008" anchor="ctr">
                     <a:solidFill>
                       <a:srgbClr val="213547"/>
                     </a:solidFill>
@@ -3995,7 +3995,7 @@
                 </a:tc>
                 <a:tc>
                   <a:txBody>
-                    <a:bodyPr wrap="square" lIns="18288" rIns="18288" tIns="13716" bIns="13716">
+                    <a:bodyPr wrap="square" anchor="t" lIns="18288" rIns="18288" tIns="13716" bIns="13716">
                       <a:noAutofit/>
                     </a:bodyPr>
                     <a:lstStyle/>
@@ -4032,7 +4032,7 @@
                       </a:r>
                     </a:p>
                   </a:txBody>
-                  <a:tcPr marL="155448" marR="155448" marT="64008" marB="64008">
+                  <a:tcPr marL="155448" marR="155448" marT="64008" marB="64008" anchor="ctr">
                     <a:solidFill>
                       <a:srgbClr val="213547"/>
                     </a:solidFill>
@@ -4042,7 +4042,7 @@
               <a:tr h="713232">
                 <a:tc>
                   <a:txBody>
-                    <a:bodyPr wrap="square" lIns="18288" rIns="18288" tIns="13716" bIns="13716">
+                    <a:bodyPr wrap="square" anchor="t" lIns="18288" rIns="18288" tIns="13716" bIns="13716">
                       <a:noAutofit/>
                     </a:bodyPr>
                     <a:lstStyle/>
@@ -4079,7 +4079,7 @@
                       </a:r>
                     </a:p>
                   </a:txBody>
-                  <a:tcPr marL="155448" marR="155448" marT="64008" marB="64008">
+                  <a:tcPr marL="155448" marR="155448" marT="64008" marB="64008" anchor="ctr">
                     <a:solidFill>
                       <a:srgbClr val="FFFFFF"/>
                     </a:solidFill>
@@ -4087,7 +4087,7 @@
                 </a:tc>
                 <a:tc>
                   <a:txBody>
-                    <a:bodyPr wrap="square" lIns="18288" rIns="18288" tIns="13716" bIns="13716">
+                    <a:bodyPr wrap="square" anchor="t" lIns="18288" rIns="18288" tIns="13716" bIns="13716">
                       <a:noAutofit/>
                     </a:bodyPr>
                     <a:lstStyle/>
@@ -4124,7 +4124,7 @@
                       </a:r>
                     </a:p>
                   </a:txBody>
-                  <a:tcPr marL="155448" marR="155448" marT="64008" marB="64008">
+                  <a:tcPr marL="155448" marR="155448" marT="64008" marB="64008" anchor="ctr">
                     <a:solidFill>
                       <a:srgbClr val="FFFFFF"/>
                     </a:solidFill>
@@ -4132,7 +4132,7 @@
                 </a:tc>
                 <a:tc>
                   <a:txBody>
-                    <a:bodyPr wrap="square" lIns="18288" rIns="18288" tIns="13716" bIns="13716">
+                    <a:bodyPr wrap="square" anchor="t" lIns="18288" rIns="18288" tIns="13716" bIns="13716">
                       <a:noAutofit/>
                     </a:bodyPr>
                     <a:lstStyle/>
@@ -4201,7 +4201,7 @@
                       </a:r>
                     </a:p>
                   </a:txBody>
-                  <a:tcPr marL="155448" marR="155448" marT="64008" marB="64008">
+                  <a:tcPr marL="155448" marR="155448" marT="64008" marB="64008" anchor="ctr">
                     <a:solidFill>
                       <a:srgbClr val="FFFFFF"/>
                     </a:solidFill>
@@ -4211,7 +4211,7 @@
               <a:tr h="713232">
                 <a:tc>
                   <a:txBody>
-                    <a:bodyPr wrap="square" lIns="18288" rIns="18288" tIns="13716" bIns="13716">
+                    <a:bodyPr wrap="square" anchor="t" lIns="18288" rIns="18288" tIns="13716" bIns="13716">
                       <a:noAutofit/>
                     </a:bodyPr>
                     <a:lstStyle/>
@@ -4248,7 +4248,7 @@
                       </a:r>
                     </a:p>
                   </a:txBody>
-                  <a:tcPr marL="155448" marR="155448" marT="64008" marB="64008">
+                  <a:tcPr marL="155448" marR="155448" marT="64008" marB="64008" anchor="ctr">
                     <a:solidFill>
                       <a:srgbClr val="EDF1F4"/>
                     </a:solidFill>
@@ -4256,7 +4256,7 @@
                 </a:tc>
                 <a:tc>
                   <a:txBody>
-                    <a:bodyPr wrap="square" lIns="18288" rIns="18288" tIns="13716" bIns="13716">
+                    <a:bodyPr wrap="square" anchor="t" lIns="18288" rIns="18288" tIns="13716" bIns="13716">
                       <a:noAutofit/>
                     </a:bodyPr>
                     <a:lstStyle/>
@@ -4293,7 +4293,7 @@
                       </a:r>
                     </a:p>
                   </a:txBody>
-                  <a:tcPr marL="155448" marR="155448" marT="64008" marB="64008">
+                  <a:tcPr marL="155448" marR="155448" marT="64008" marB="64008" anchor="ctr">
                     <a:solidFill>
                       <a:srgbClr val="EDF1F4"/>
                     </a:solidFill>
@@ -4301,7 +4301,7 @@
                 </a:tc>
                 <a:tc>
                   <a:txBody>
-                    <a:bodyPr wrap="square" lIns="18288" rIns="18288" tIns="13716" bIns="13716">
+                    <a:bodyPr wrap="square" anchor="t" lIns="18288" rIns="18288" tIns="13716" bIns="13716">
                       <a:noAutofit/>
                     </a:bodyPr>
                     <a:lstStyle/>
@@ -4370,7 +4370,7 @@
                       </a:r>
                     </a:p>
                   </a:txBody>
-                  <a:tcPr marL="155448" marR="155448" marT="64008" marB="64008">
+                  <a:tcPr marL="155448" marR="155448" marT="64008" marB="64008" anchor="ctr">
                     <a:solidFill>
                       <a:srgbClr val="EDF1F4"/>
                     </a:solidFill>
@@ -4380,7 +4380,7 @@
               <a:tr h="713232">
                 <a:tc>
                   <a:txBody>
-                    <a:bodyPr wrap="square" lIns="18288" rIns="18288" tIns="13716" bIns="13716">
+                    <a:bodyPr wrap="square" anchor="t" lIns="18288" rIns="18288" tIns="13716" bIns="13716">
                       <a:noAutofit/>
                     </a:bodyPr>
                     <a:lstStyle/>
@@ -4417,7 +4417,7 @@
                       </a:r>
                     </a:p>
                   </a:txBody>
-                  <a:tcPr marL="155448" marR="155448" marT="64008" marB="64008">
+                  <a:tcPr marL="155448" marR="155448" marT="64008" marB="64008" anchor="ctr">
                     <a:solidFill>
                       <a:srgbClr val="FFFFFF"/>
                     </a:solidFill>
@@ -4425,7 +4425,7 @@
                 </a:tc>
                 <a:tc>
                   <a:txBody>
-                    <a:bodyPr wrap="square" lIns="18288" rIns="18288" tIns="13716" bIns="13716">
+                    <a:bodyPr wrap="square" anchor="t" lIns="18288" rIns="18288" tIns="13716" bIns="13716">
                       <a:noAutofit/>
                     </a:bodyPr>
                     <a:lstStyle/>
@@ -4462,7 +4462,7 @@
                       </a:r>
                     </a:p>
                   </a:txBody>
-                  <a:tcPr marL="155448" marR="155448" marT="64008" marB="64008">
+                  <a:tcPr marL="155448" marR="155448" marT="64008" marB="64008" anchor="ctr">
                     <a:solidFill>
                       <a:srgbClr val="FFFFFF"/>
                     </a:solidFill>
@@ -4470,7 +4470,7 @@
                 </a:tc>
                 <a:tc>
                   <a:txBody>
-                    <a:bodyPr wrap="square" lIns="18288" rIns="18288" tIns="13716" bIns="13716">
+                    <a:bodyPr wrap="square" anchor="t" lIns="18288" rIns="18288" tIns="13716" bIns="13716">
                       <a:noAutofit/>
                     </a:bodyPr>
                     <a:lstStyle/>
@@ -4539,7 +4539,7 @@
                       </a:r>
                     </a:p>
                   </a:txBody>
-                  <a:tcPr marL="155448" marR="155448" marT="64008" marB="64008">
+                  <a:tcPr marL="155448" marR="155448" marT="64008" marB="64008" anchor="ctr">
                     <a:solidFill>
                       <a:srgbClr val="FFFFFF"/>
                     </a:solidFill>
@@ -4549,7 +4549,7 @@
               <a:tr h="713232">
                 <a:tc>
                   <a:txBody>
-                    <a:bodyPr wrap="square" lIns="18288" rIns="18288" tIns="13716" bIns="13716">
+                    <a:bodyPr wrap="square" anchor="t" lIns="18288" rIns="18288" tIns="13716" bIns="13716">
                       <a:noAutofit/>
                     </a:bodyPr>
                     <a:lstStyle/>
@@ -4586,7 +4586,7 @@
                       </a:r>
                     </a:p>
                   </a:txBody>
-                  <a:tcPr marL="155448" marR="155448" marT="64008" marB="64008">
+                  <a:tcPr marL="155448" marR="155448" marT="64008" marB="64008" anchor="ctr">
                     <a:solidFill>
                       <a:srgbClr val="EDF1F4"/>
                     </a:solidFill>
@@ -4594,7 +4594,7 @@
                 </a:tc>
                 <a:tc>
                   <a:txBody>
-                    <a:bodyPr wrap="square" lIns="18288" rIns="18288" tIns="13716" bIns="13716">
+                    <a:bodyPr wrap="square" anchor="t" lIns="18288" rIns="18288" tIns="13716" bIns="13716">
                       <a:noAutofit/>
                     </a:bodyPr>
                     <a:lstStyle/>
@@ -4631,7 +4631,7 @@
                       </a:r>
                     </a:p>
                   </a:txBody>
-                  <a:tcPr marL="155448" marR="155448" marT="64008" marB="64008">
+                  <a:tcPr marL="155448" marR="155448" marT="64008" marB="64008" anchor="ctr">
                     <a:solidFill>
                       <a:srgbClr val="EDF1F4"/>
                     </a:solidFill>
@@ -4639,7 +4639,7 @@
                 </a:tc>
                 <a:tc>
                   <a:txBody>
-                    <a:bodyPr wrap="square" lIns="18288" rIns="18288" tIns="13716" bIns="13716">
+                    <a:bodyPr wrap="square" anchor="t" lIns="18288" rIns="18288" tIns="13716" bIns="13716">
                       <a:noAutofit/>
                     </a:bodyPr>
                     <a:lstStyle/>
@@ -4708,7 +4708,7 @@
                       </a:r>
                     </a:p>
                   </a:txBody>
-                  <a:tcPr marL="155448" marR="155448" marT="64008" marB="64008">
+                  <a:tcPr marL="155448" marR="155448" marT="64008" marB="64008" anchor="ctr">
                     <a:solidFill>
                       <a:srgbClr val="EDF1F4"/>
                     </a:solidFill>
@@ -4736,7 +4736,7 @@
           <a:noFill/>
         </p:spPr>
         <p:txBody>
-          <a:bodyPr wrap="square" lIns="18288" rIns="18288" tIns="13716" bIns="13716">
+          <a:bodyPr wrap="square" anchor="t" lIns="18288" rIns="18288" tIns="13716" bIns="13716">
             <a:noAutofit/>
           </a:bodyPr>
           <a:lstStyle/>
